--- a/向耶和華唱新歌.pptx
+++ b/向耶和華唱新歌.pptx
@@ -5,8 +5,12 @@
     <p:sldMasterId id="2147483672" r:id="rId1"/>
   </p:sldMasterIdLst>
   <p:sldIdLst>
-    <p:sldId id="256" r:id="rId2"/>
-    <p:sldId id="258" r:id="rId3"/>
+    <p:sldId id="719" r:id="rId2"/>
+    <p:sldId id="720" r:id="rId3"/>
+    <p:sldId id="721" r:id="rId4"/>
+    <p:sldId id="722" r:id="rId5"/>
+    <p:sldId id="723" r:id="rId6"/>
+    <p:sldId id="724" r:id="rId7"/>
   </p:sldIdLst>
   <p:sldSz cx="12192000" cy="6858000"/>
   <p:notesSz cx="6858000" cy="9144000"/>
@@ -162,10 +166,9 @@
           <a:lstStyle/>
           <a:p>
             <a:r>
-              <a:rPr lang="zh-TW" altLang="en-US" smtClean="0"/>
+              <a:rPr lang="zh-TW" altLang="en-US"/>
               <a:t>按一下以編輯母片標題樣式</a:t>
             </a:r>
-            <a:endParaRPr lang="zh-TW" altLang="en-US"/>
           </a:p>
         </p:txBody>
       </p:sp>
@@ -281,10 +284,9 @@
           </a:lstStyle>
           <a:p>
             <a:r>
-              <a:rPr lang="zh-TW" altLang="en-US" smtClean="0"/>
+              <a:rPr lang="zh-TW" altLang="en-US"/>
               <a:t>按一下以編輯母片副標題樣式</a:t>
             </a:r>
-            <a:endParaRPr lang="zh-TW" altLang="en-US"/>
           </a:p>
         </p:txBody>
       </p:sp>
@@ -306,7 +308,7 @@
             <a:fld id="{AF1B840E-4CA1-456E-BCF5-F0E669317627}" type="datetimeFigureOut">
               <a:rPr lang="zh-TW" altLang="en-US" smtClean="0"/>
               <a:pPr/>
-              <a:t>2020/3/7</a:t>
+              <a:t>2024/3/16</a:t>
             </a:fld>
             <a:endParaRPr lang="zh-TW" altLang="en-US"/>
           </a:p>
@@ -396,10 +398,9 @@
           <a:lstStyle/>
           <a:p>
             <a:r>
-              <a:rPr lang="zh-TW" altLang="en-US" smtClean="0"/>
+              <a:rPr lang="zh-TW" altLang="en-US"/>
               <a:t>按一下以編輯母片標題樣式</a:t>
             </a:r>
-            <a:endParaRPr lang="zh-TW" altLang="en-US"/>
           </a:p>
         </p:txBody>
       </p:sp>
@@ -420,38 +421,37 @@
           <a:p>
             <a:pPr lvl="0"/>
             <a:r>
-              <a:rPr lang="zh-TW" altLang="en-US" smtClean="0"/>
+              <a:rPr lang="zh-TW" altLang="en-US"/>
               <a:t>按一下以編輯母片文字樣式</a:t>
             </a:r>
           </a:p>
           <a:p>
             <a:pPr lvl="1"/>
             <a:r>
-              <a:rPr lang="zh-TW" altLang="en-US" smtClean="0"/>
+              <a:rPr lang="zh-TW" altLang="en-US"/>
               <a:t>第二層</a:t>
             </a:r>
           </a:p>
           <a:p>
             <a:pPr lvl="2"/>
             <a:r>
-              <a:rPr lang="zh-TW" altLang="en-US" smtClean="0"/>
+              <a:rPr lang="zh-TW" altLang="en-US"/>
               <a:t>第三層</a:t>
             </a:r>
           </a:p>
           <a:p>
             <a:pPr lvl="3"/>
             <a:r>
-              <a:rPr lang="zh-TW" altLang="en-US" smtClean="0"/>
+              <a:rPr lang="zh-TW" altLang="en-US"/>
               <a:t>第四層</a:t>
             </a:r>
           </a:p>
           <a:p>
             <a:pPr lvl="4"/>
             <a:r>
-              <a:rPr lang="zh-TW" altLang="en-US" smtClean="0"/>
+              <a:rPr lang="zh-TW" altLang="en-US"/>
               <a:t>第五層</a:t>
             </a:r>
-            <a:endParaRPr lang="zh-TW" altLang="en-US"/>
           </a:p>
         </p:txBody>
       </p:sp>
@@ -473,7 +473,7 @@
             <a:fld id="{AF1B840E-4CA1-456E-BCF5-F0E669317627}" type="datetimeFigureOut">
               <a:rPr lang="zh-TW" altLang="en-US" smtClean="0"/>
               <a:pPr/>
-              <a:t>2020/3/7</a:t>
+              <a:t>2024/3/16</a:t>
             </a:fld>
             <a:endParaRPr lang="zh-TW" altLang="en-US"/>
           </a:p>
@@ -568,10 +568,9 @@
           <a:lstStyle/>
           <a:p>
             <a:r>
-              <a:rPr lang="zh-TW" altLang="en-US" smtClean="0"/>
+              <a:rPr lang="zh-TW" altLang="en-US"/>
               <a:t>按一下以編輯母片標題樣式</a:t>
             </a:r>
-            <a:endParaRPr lang="zh-TW" altLang="en-US"/>
           </a:p>
         </p:txBody>
       </p:sp>
@@ -597,38 +596,37 @@
           <a:p>
             <a:pPr lvl="0"/>
             <a:r>
-              <a:rPr lang="zh-TW" altLang="en-US" smtClean="0"/>
+              <a:rPr lang="zh-TW" altLang="en-US"/>
               <a:t>按一下以編輯母片文字樣式</a:t>
             </a:r>
           </a:p>
           <a:p>
             <a:pPr lvl="1"/>
             <a:r>
-              <a:rPr lang="zh-TW" altLang="en-US" smtClean="0"/>
+              <a:rPr lang="zh-TW" altLang="en-US"/>
               <a:t>第二層</a:t>
             </a:r>
           </a:p>
           <a:p>
             <a:pPr lvl="2"/>
             <a:r>
-              <a:rPr lang="zh-TW" altLang="en-US" smtClean="0"/>
+              <a:rPr lang="zh-TW" altLang="en-US"/>
               <a:t>第三層</a:t>
             </a:r>
           </a:p>
           <a:p>
             <a:pPr lvl="3"/>
             <a:r>
-              <a:rPr lang="zh-TW" altLang="en-US" smtClean="0"/>
+              <a:rPr lang="zh-TW" altLang="en-US"/>
               <a:t>第四層</a:t>
             </a:r>
           </a:p>
           <a:p>
             <a:pPr lvl="4"/>
             <a:r>
-              <a:rPr lang="zh-TW" altLang="en-US" smtClean="0"/>
+              <a:rPr lang="zh-TW" altLang="en-US"/>
               <a:t>第五層</a:t>
             </a:r>
-            <a:endParaRPr lang="zh-TW" altLang="en-US"/>
           </a:p>
         </p:txBody>
       </p:sp>
@@ -650,7 +648,7 @@
             <a:fld id="{AF1B840E-4CA1-456E-BCF5-F0E669317627}" type="datetimeFigureOut">
               <a:rPr lang="zh-TW" altLang="en-US" smtClean="0"/>
               <a:pPr/>
-              <a:t>2020/3/7</a:t>
+              <a:t>2024/3/16</a:t>
             </a:fld>
             <a:endParaRPr lang="zh-TW" altLang="en-US"/>
           </a:p>
@@ -740,10 +738,9 @@
           <a:lstStyle/>
           <a:p>
             <a:r>
-              <a:rPr lang="zh-TW" altLang="en-US" smtClean="0"/>
+              <a:rPr lang="zh-TW" altLang="en-US"/>
               <a:t>按一下以編輯母片標題樣式</a:t>
             </a:r>
-            <a:endParaRPr lang="zh-TW" altLang="en-US"/>
           </a:p>
         </p:txBody>
       </p:sp>
@@ -764,38 +761,37 @@
           <a:p>
             <a:pPr lvl="0"/>
             <a:r>
-              <a:rPr lang="zh-TW" altLang="en-US" smtClean="0"/>
+              <a:rPr lang="zh-TW" altLang="en-US"/>
               <a:t>按一下以編輯母片文字樣式</a:t>
             </a:r>
           </a:p>
           <a:p>
             <a:pPr lvl="1"/>
             <a:r>
-              <a:rPr lang="zh-TW" altLang="en-US" smtClean="0"/>
+              <a:rPr lang="zh-TW" altLang="en-US"/>
               <a:t>第二層</a:t>
             </a:r>
           </a:p>
           <a:p>
             <a:pPr lvl="2"/>
             <a:r>
-              <a:rPr lang="zh-TW" altLang="en-US" smtClean="0"/>
+              <a:rPr lang="zh-TW" altLang="en-US"/>
               <a:t>第三層</a:t>
             </a:r>
           </a:p>
           <a:p>
             <a:pPr lvl="3"/>
             <a:r>
-              <a:rPr lang="zh-TW" altLang="en-US" smtClean="0"/>
+              <a:rPr lang="zh-TW" altLang="en-US"/>
               <a:t>第四層</a:t>
             </a:r>
           </a:p>
           <a:p>
             <a:pPr lvl="4"/>
             <a:r>
-              <a:rPr lang="zh-TW" altLang="en-US" smtClean="0"/>
+              <a:rPr lang="zh-TW" altLang="en-US"/>
               <a:t>第五層</a:t>
             </a:r>
-            <a:endParaRPr lang="zh-TW" altLang="en-US"/>
           </a:p>
         </p:txBody>
       </p:sp>
@@ -817,7 +813,7 @@
             <a:fld id="{AF1B840E-4CA1-456E-BCF5-F0E669317627}" type="datetimeFigureOut">
               <a:rPr lang="zh-TW" altLang="en-US" smtClean="0"/>
               <a:pPr/>
-              <a:t>2020/3/7</a:t>
+              <a:t>2024/3/16</a:t>
             </a:fld>
             <a:endParaRPr lang="zh-TW" altLang="en-US"/>
           </a:p>
@@ -916,10 +912,9 @@
           </a:lstStyle>
           <a:p>
             <a:r>
-              <a:rPr lang="zh-TW" altLang="en-US" smtClean="0"/>
+              <a:rPr lang="zh-TW" altLang="en-US"/>
               <a:t>按一下以編輯母片標題樣式</a:t>
             </a:r>
-            <a:endParaRPr lang="zh-TW" altLang="en-US"/>
           </a:p>
         </p:txBody>
       </p:sp>
@@ -1036,7 +1031,7 @@
           <a:p>
             <a:pPr lvl="0"/>
             <a:r>
-              <a:rPr lang="zh-TW" altLang="en-US" smtClean="0"/>
+              <a:rPr lang="zh-TW" altLang="en-US"/>
               <a:t>按一下以編輯母片文字樣式</a:t>
             </a:r>
           </a:p>
@@ -1060,7 +1055,7 @@
             <a:fld id="{AF1B840E-4CA1-456E-BCF5-F0E669317627}" type="datetimeFigureOut">
               <a:rPr lang="zh-TW" altLang="en-US" smtClean="0"/>
               <a:pPr/>
-              <a:t>2020/3/7</a:t>
+              <a:t>2024/3/16</a:t>
             </a:fld>
             <a:endParaRPr lang="zh-TW" altLang="en-US"/>
           </a:p>
@@ -1150,10 +1145,9 @@
           <a:lstStyle/>
           <a:p>
             <a:r>
-              <a:rPr lang="zh-TW" altLang="en-US" smtClean="0"/>
+              <a:rPr lang="zh-TW" altLang="en-US"/>
               <a:t>按一下以編輯母片標題樣式</a:t>
             </a:r>
-            <a:endParaRPr lang="zh-TW" altLang="en-US"/>
           </a:p>
         </p:txBody>
       </p:sp>
@@ -1207,38 +1201,37 @@
           <a:p>
             <a:pPr lvl="0"/>
             <a:r>
-              <a:rPr lang="zh-TW" altLang="en-US" smtClean="0"/>
+              <a:rPr lang="zh-TW" altLang="en-US"/>
               <a:t>按一下以編輯母片文字樣式</a:t>
             </a:r>
           </a:p>
           <a:p>
             <a:pPr lvl="1"/>
             <a:r>
-              <a:rPr lang="zh-TW" altLang="en-US" smtClean="0"/>
+              <a:rPr lang="zh-TW" altLang="en-US"/>
               <a:t>第二層</a:t>
             </a:r>
           </a:p>
           <a:p>
             <a:pPr lvl="2"/>
             <a:r>
-              <a:rPr lang="zh-TW" altLang="en-US" smtClean="0"/>
+              <a:rPr lang="zh-TW" altLang="en-US"/>
               <a:t>第三層</a:t>
             </a:r>
           </a:p>
           <a:p>
             <a:pPr lvl="3"/>
             <a:r>
-              <a:rPr lang="zh-TW" altLang="en-US" smtClean="0"/>
+              <a:rPr lang="zh-TW" altLang="en-US"/>
               <a:t>第四層</a:t>
             </a:r>
           </a:p>
           <a:p>
             <a:pPr lvl="4"/>
             <a:r>
-              <a:rPr lang="zh-TW" altLang="en-US" smtClean="0"/>
+              <a:rPr lang="zh-TW" altLang="en-US"/>
               <a:t>第五層</a:t>
             </a:r>
-            <a:endParaRPr lang="zh-TW" altLang="en-US"/>
           </a:p>
         </p:txBody>
       </p:sp>
@@ -1292,38 +1285,37 @@
           <a:p>
             <a:pPr lvl="0"/>
             <a:r>
-              <a:rPr lang="zh-TW" altLang="en-US" smtClean="0"/>
+              <a:rPr lang="zh-TW" altLang="en-US"/>
               <a:t>按一下以編輯母片文字樣式</a:t>
             </a:r>
           </a:p>
           <a:p>
             <a:pPr lvl="1"/>
             <a:r>
-              <a:rPr lang="zh-TW" altLang="en-US" smtClean="0"/>
+              <a:rPr lang="zh-TW" altLang="en-US"/>
               <a:t>第二層</a:t>
             </a:r>
           </a:p>
           <a:p>
             <a:pPr lvl="2"/>
             <a:r>
-              <a:rPr lang="zh-TW" altLang="en-US" smtClean="0"/>
+              <a:rPr lang="zh-TW" altLang="en-US"/>
               <a:t>第三層</a:t>
             </a:r>
           </a:p>
           <a:p>
             <a:pPr lvl="3"/>
             <a:r>
-              <a:rPr lang="zh-TW" altLang="en-US" smtClean="0"/>
+              <a:rPr lang="zh-TW" altLang="en-US"/>
               <a:t>第四層</a:t>
             </a:r>
           </a:p>
           <a:p>
             <a:pPr lvl="4"/>
             <a:r>
-              <a:rPr lang="zh-TW" altLang="en-US" smtClean="0"/>
+              <a:rPr lang="zh-TW" altLang="en-US"/>
               <a:t>第五層</a:t>
             </a:r>
-            <a:endParaRPr lang="zh-TW" altLang="en-US"/>
           </a:p>
         </p:txBody>
       </p:sp>
@@ -1345,7 +1337,7 @@
             <a:fld id="{AF1B840E-4CA1-456E-BCF5-F0E669317627}" type="datetimeFigureOut">
               <a:rPr lang="zh-TW" altLang="en-US" smtClean="0"/>
               <a:pPr/>
-              <a:t>2020/3/7</a:t>
+              <a:t>2024/3/16</a:t>
             </a:fld>
             <a:endParaRPr lang="zh-TW" altLang="en-US"/>
           </a:p>
@@ -1439,10 +1431,9 @@
           </a:lstStyle>
           <a:p>
             <a:r>
-              <a:rPr lang="zh-TW" altLang="en-US" smtClean="0"/>
+              <a:rPr lang="zh-TW" altLang="en-US"/>
               <a:t>按一下以編輯母片標題樣式</a:t>
             </a:r>
-            <a:endParaRPr lang="zh-TW" altLang="en-US"/>
           </a:p>
         </p:txBody>
       </p:sp>
@@ -1505,7 +1496,7 @@
           <a:p>
             <a:pPr lvl="0"/>
             <a:r>
-              <a:rPr lang="zh-TW" altLang="en-US" smtClean="0"/>
+              <a:rPr lang="zh-TW" altLang="en-US"/>
               <a:t>按一下以編輯母片文字樣式</a:t>
             </a:r>
           </a:p>
@@ -1561,38 +1552,37 @@
           <a:p>
             <a:pPr lvl="0"/>
             <a:r>
-              <a:rPr lang="zh-TW" altLang="en-US" smtClean="0"/>
+              <a:rPr lang="zh-TW" altLang="en-US"/>
               <a:t>按一下以編輯母片文字樣式</a:t>
             </a:r>
           </a:p>
           <a:p>
             <a:pPr lvl="1"/>
             <a:r>
-              <a:rPr lang="zh-TW" altLang="en-US" smtClean="0"/>
+              <a:rPr lang="zh-TW" altLang="en-US"/>
               <a:t>第二層</a:t>
             </a:r>
           </a:p>
           <a:p>
             <a:pPr lvl="2"/>
             <a:r>
-              <a:rPr lang="zh-TW" altLang="en-US" smtClean="0"/>
+              <a:rPr lang="zh-TW" altLang="en-US"/>
               <a:t>第三層</a:t>
             </a:r>
           </a:p>
           <a:p>
             <a:pPr lvl="3"/>
             <a:r>
-              <a:rPr lang="zh-TW" altLang="en-US" smtClean="0"/>
+              <a:rPr lang="zh-TW" altLang="en-US"/>
               <a:t>第四層</a:t>
             </a:r>
           </a:p>
           <a:p>
             <a:pPr lvl="4"/>
             <a:r>
-              <a:rPr lang="zh-TW" altLang="en-US" smtClean="0"/>
+              <a:rPr lang="zh-TW" altLang="en-US"/>
               <a:t>第五層</a:t>
             </a:r>
-            <a:endParaRPr lang="zh-TW" altLang="en-US"/>
           </a:p>
         </p:txBody>
       </p:sp>
@@ -1655,7 +1645,7 @@
           <a:p>
             <a:pPr lvl="0"/>
             <a:r>
-              <a:rPr lang="zh-TW" altLang="en-US" smtClean="0"/>
+              <a:rPr lang="zh-TW" altLang="en-US"/>
               <a:t>按一下以編輯母片文字樣式</a:t>
             </a:r>
           </a:p>
@@ -1711,38 +1701,37 @@
           <a:p>
             <a:pPr lvl="0"/>
             <a:r>
-              <a:rPr lang="zh-TW" altLang="en-US" smtClean="0"/>
+              <a:rPr lang="zh-TW" altLang="en-US"/>
               <a:t>按一下以編輯母片文字樣式</a:t>
             </a:r>
           </a:p>
           <a:p>
             <a:pPr lvl="1"/>
             <a:r>
-              <a:rPr lang="zh-TW" altLang="en-US" smtClean="0"/>
+              <a:rPr lang="zh-TW" altLang="en-US"/>
               <a:t>第二層</a:t>
             </a:r>
           </a:p>
           <a:p>
             <a:pPr lvl="2"/>
             <a:r>
-              <a:rPr lang="zh-TW" altLang="en-US" smtClean="0"/>
+              <a:rPr lang="zh-TW" altLang="en-US"/>
               <a:t>第三層</a:t>
             </a:r>
           </a:p>
           <a:p>
             <a:pPr lvl="3"/>
             <a:r>
-              <a:rPr lang="zh-TW" altLang="en-US" smtClean="0"/>
+              <a:rPr lang="zh-TW" altLang="en-US"/>
               <a:t>第四層</a:t>
             </a:r>
           </a:p>
           <a:p>
             <a:pPr lvl="4"/>
             <a:r>
-              <a:rPr lang="zh-TW" altLang="en-US" smtClean="0"/>
+              <a:rPr lang="zh-TW" altLang="en-US"/>
               <a:t>第五層</a:t>
             </a:r>
-            <a:endParaRPr lang="zh-TW" altLang="en-US"/>
           </a:p>
         </p:txBody>
       </p:sp>
@@ -1764,7 +1753,7 @@
             <a:fld id="{AF1B840E-4CA1-456E-BCF5-F0E669317627}" type="datetimeFigureOut">
               <a:rPr lang="zh-TW" altLang="en-US" smtClean="0"/>
               <a:pPr/>
-              <a:t>2020/3/7</a:t>
+              <a:t>2024/3/16</a:t>
             </a:fld>
             <a:endParaRPr lang="zh-TW" altLang="en-US"/>
           </a:p>
@@ -1854,10 +1843,9 @@
           <a:lstStyle/>
           <a:p>
             <a:r>
-              <a:rPr lang="zh-TW" altLang="en-US" smtClean="0"/>
+              <a:rPr lang="zh-TW" altLang="en-US"/>
               <a:t>按一下以編輯母片標題樣式</a:t>
             </a:r>
-            <a:endParaRPr lang="zh-TW" altLang="en-US"/>
           </a:p>
         </p:txBody>
       </p:sp>
@@ -1879,7 +1867,7 @@
             <a:fld id="{AF1B840E-4CA1-456E-BCF5-F0E669317627}" type="datetimeFigureOut">
               <a:rPr lang="zh-TW" altLang="en-US" smtClean="0"/>
               <a:pPr/>
-              <a:t>2020/3/7</a:t>
+              <a:t>2024/3/16</a:t>
             </a:fld>
             <a:endParaRPr lang="zh-TW" altLang="en-US"/>
           </a:p>
@@ -1971,7 +1959,7 @@
             <a:fld id="{AF1B840E-4CA1-456E-BCF5-F0E669317627}" type="datetimeFigureOut">
               <a:rPr lang="zh-TW" altLang="en-US" smtClean="0"/>
               <a:pPr/>
-              <a:t>2020/3/7</a:t>
+              <a:t>2024/3/16</a:t>
             </a:fld>
             <a:endParaRPr lang="zh-TW" altLang="en-US"/>
           </a:p>
@@ -2070,10 +2058,9 @@
           </a:lstStyle>
           <a:p>
             <a:r>
-              <a:rPr lang="zh-TW" altLang="en-US" smtClean="0"/>
+              <a:rPr lang="zh-TW" altLang="en-US"/>
               <a:t>按一下以編輯母片標題樣式</a:t>
             </a:r>
-            <a:endParaRPr lang="zh-TW" altLang="en-US"/>
           </a:p>
         </p:txBody>
       </p:sp>
@@ -2127,38 +2114,37 @@
           <a:p>
             <a:pPr lvl="0"/>
             <a:r>
-              <a:rPr lang="zh-TW" altLang="en-US" smtClean="0"/>
+              <a:rPr lang="zh-TW" altLang="en-US"/>
               <a:t>按一下以編輯母片文字樣式</a:t>
             </a:r>
           </a:p>
           <a:p>
             <a:pPr lvl="1"/>
             <a:r>
-              <a:rPr lang="zh-TW" altLang="en-US" smtClean="0"/>
+              <a:rPr lang="zh-TW" altLang="en-US"/>
               <a:t>第二層</a:t>
             </a:r>
           </a:p>
           <a:p>
             <a:pPr lvl="2"/>
             <a:r>
-              <a:rPr lang="zh-TW" altLang="en-US" smtClean="0"/>
+              <a:rPr lang="zh-TW" altLang="en-US"/>
               <a:t>第三層</a:t>
             </a:r>
           </a:p>
           <a:p>
             <a:pPr lvl="3"/>
             <a:r>
-              <a:rPr lang="zh-TW" altLang="en-US" smtClean="0"/>
+              <a:rPr lang="zh-TW" altLang="en-US"/>
               <a:t>第四層</a:t>
             </a:r>
           </a:p>
           <a:p>
             <a:pPr lvl="4"/>
             <a:r>
-              <a:rPr lang="zh-TW" altLang="en-US" smtClean="0"/>
+              <a:rPr lang="zh-TW" altLang="en-US"/>
               <a:t>第五層</a:t>
             </a:r>
-            <a:endParaRPr lang="zh-TW" altLang="en-US"/>
           </a:p>
         </p:txBody>
       </p:sp>
@@ -2221,7 +2207,7 @@
           <a:p>
             <a:pPr lvl="0"/>
             <a:r>
-              <a:rPr lang="zh-TW" altLang="en-US" smtClean="0"/>
+              <a:rPr lang="zh-TW" altLang="en-US"/>
               <a:t>按一下以編輯母片文字樣式</a:t>
             </a:r>
           </a:p>
@@ -2245,7 +2231,7 @@
             <a:fld id="{AF1B840E-4CA1-456E-BCF5-F0E669317627}" type="datetimeFigureOut">
               <a:rPr lang="zh-TW" altLang="en-US" smtClean="0"/>
               <a:pPr/>
-              <a:t>2020/3/7</a:t>
+              <a:t>2024/3/16</a:t>
             </a:fld>
             <a:endParaRPr lang="zh-TW" altLang="en-US"/>
           </a:p>
@@ -2344,10 +2330,9 @@
           </a:lstStyle>
           <a:p>
             <a:r>
-              <a:rPr lang="zh-TW" altLang="en-US" smtClean="0"/>
+              <a:rPr lang="zh-TW" altLang="en-US"/>
               <a:t>按一下以編輯母片標題樣式</a:t>
             </a:r>
-            <a:endParaRPr lang="zh-TW" altLang="en-US"/>
           </a:p>
         </p:txBody>
       </p:sp>
@@ -2409,10 +2394,9 @@
           </a:lstStyle>
           <a:p>
             <a:r>
-              <a:rPr lang="zh-TW" altLang="en-US" smtClean="0"/>
+              <a:rPr lang="zh-TW" altLang="en-US"/>
               <a:t>按一下圖示以新增圖片</a:t>
             </a:r>
-            <a:endParaRPr lang="zh-TW" altLang="en-US"/>
           </a:p>
         </p:txBody>
       </p:sp>
@@ -2475,7 +2459,7 @@
           <a:p>
             <a:pPr lvl="0"/>
             <a:r>
-              <a:rPr lang="zh-TW" altLang="en-US" smtClean="0"/>
+              <a:rPr lang="zh-TW" altLang="en-US"/>
               <a:t>按一下以編輯母片文字樣式</a:t>
             </a:r>
           </a:p>
@@ -2499,7 +2483,7 @@
             <a:fld id="{AF1B840E-4CA1-456E-BCF5-F0E669317627}" type="datetimeFigureOut">
               <a:rPr lang="zh-TW" altLang="en-US" smtClean="0"/>
               <a:pPr/>
-              <a:t>2020/3/7</a:t>
+              <a:t>2024/3/16</a:t>
             </a:fld>
             <a:endParaRPr lang="zh-TW" altLang="en-US"/>
           </a:p>
@@ -2609,10 +2593,9 @@
           <a:lstStyle/>
           <a:p>
             <a:r>
-              <a:rPr lang="zh-TW" altLang="en-US" smtClean="0"/>
+              <a:rPr lang="zh-TW" altLang="en-US"/>
               <a:t>按一下以編輯母片標題樣式</a:t>
             </a:r>
-            <a:endParaRPr lang="zh-TW" altLang="en-US"/>
           </a:p>
         </p:txBody>
       </p:sp>
@@ -2643,38 +2626,37 @@
           <a:p>
             <a:pPr lvl="0"/>
             <a:r>
-              <a:rPr lang="zh-TW" altLang="en-US" smtClean="0"/>
+              <a:rPr lang="zh-TW" altLang="en-US"/>
               <a:t>按一下以編輯母片文字樣式</a:t>
             </a:r>
           </a:p>
           <a:p>
             <a:pPr lvl="1"/>
             <a:r>
-              <a:rPr lang="zh-TW" altLang="en-US" smtClean="0"/>
+              <a:rPr lang="zh-TW" altLang="en-US"/>
               <a:t>第二層</a:t>
             </a:r>
           </a:p>
           <a:p>
             <a:pPr lvl="2"/>
             <a:r>
-              <a:rPr lang="zh-TW" altLang="en-US" smtClean="0"/>
+              <a:rPr lang="zh-TW" altLang="en-US"/>
               <a:t>第三層</a:t>
             </a:r>
           </a:p>
           <a:p>
             <a:pPr lvl="3"/>
             <a:r>
-              <a:rPr lang="zh-TW" altLang="en-US" smtClean="0"/>
+              <a:rPr lang="zh-TW" altLang="en-US"/>
               <a:t>第四層</a:t>
             </a:r>
           </a:p>
           <a:p>
             <a:pPr lvl="4"/>
             <a:r>
-              <a:rPr lang="zh-TW" altLang="en-US" smtClean="0"/>
+              <a:rPr lang="zh-TW" altLang="en-US"/>
               <a:t>第五層</a:t>
             </a:r>
-            <a:endParaRPr lang="zh-TW" altLang="en-US"/>
           </a:p>
         </p:txBody>
       </p:sp>
@@ -2714,7 +2696,7 @@
             <a:fld id="{AF1B840E-4CA1-456E-BCF5-F0E669317627}" type="datetimeFigureOut">
               <a:rPr lang="zh-TW" altLang="en-US" smtClean="0"/>
               <a:pPr/>
-              <a:t>2020/3/7</a:t>
+              <a:t>2024/3/16</a:t>
             </a:fld>
             <a:endParaRPr lang="zh-TW" altLang="en-US"/>
           </a:p>
@@ -3097,220 +3079,33 @@
         </p:nvSpPr>
         <p:spPr>
           <a:xfrm>
-            <a:off x="1524000" y="0"/>
-            <a:ext cx="9144000" cy="928670"/>
+            <a:off x="0" y="2660915"/>
+            <a:ext cx="12192000" cy="1143000"/>
           </a:xfrm>
         </p:spPr>
         <p:txBody>
           <a:bodyPr>
-            <a:normAutofit/>
+            <a:noAutofit/>
           </a:bodyPr>
           <a:lstStyle/>
           <a:p>
             <a:r>
-              <a:rPr lang="zh-TW" altLang="en-US" b="1" dirty="0">
+              <a:rPr lang="zh-TW" altLang="en-US" sz="7200" b="1" i="1" dirty="0">
                 <a:solidFill>
                   <a:srgbClr val="000066"/>
                 </a:solidFill>
+                <a:effectLst>
+                  <a:outerShdw blurRad="38100" dist="38100" dir="2700000" algn="tl">
+                    <a:srgbClr val="000000">
+                      <a:alpha val="43137"/>
+                    </a:srgbClr>
+                  </a:outerShdw>
+                </a:effectLst>
                 <a:latin typeface="微軟正黑體" pitchFamily="34" charset="-120"/>
                 <a:ea typeface="微軟正黑體" pitchFamily="34" charset="-120"/>
               </a:rPr>
-              <a:t>向耶和華唱新</a:t>
-            </a:r>
-            <a:r>
-              <a:rPr lang="zh-TW" altLang="en-US" b="1" dirty="0" smtClean="0">
-                <a:solidFill>
-                  <a:srgbClr val="000066"/>
-                </a:solidFill>
-                <a:latin typeface="微軟正黑體" pitchFamily="34" charset="-120"/>
-                <a:ea typeface="微軟正黑體" pitchFamily="34" charset="-120"/>
-              </a:rPr>
-              <a:t>歌</a:t>
-            </a:r>
-            <a:endParaRPr lang="zh-TW" altLang="en-US" b="1" dirty="0">
-              <a:solidFill>
-                <a:srgbClr val="000066"/>
-              </a:solidFill>
-              <a:latin typeface="微軟正黑體" pitchFamily="34" charset="-120"/>
-              <a:ea typeface="微軟正黑體" pitchFamily="34" charset="-120"/>
-            </a:endParaRPr>
-          </a:p>
-        </p:txBody>
-      </p:sp>
-      <p:sp>
-        <p:nvSpPr>
-          <p:cNvPr id="5" name="內容版面配置區 4"/>
-          <p:cNvSpPr>
-            <a:spLocks noGrp="1"/>
-          </p:cNvSpPr>
-          <p:nvPr>
-            <p:ph idx="1"/>
-          </p:nvPr>
-        </p:nvSpPr>
-        <p:spPr>
-          <a:xfrm>
-            <a:off x="1524000" y="928646"/>
-            <a:ext cx="9043958" cy="5929354"/>
-          </a:xfrm>
-        </p:spPr>
-        <p:txBody>
-          <a:bodyPr>
-            <a:noAutofit/>
-          </a:bodyPr>
-          <a:lstStyle/>
-          <a:p>
-            <a:pPr algn="ctr">
-              <a:buNone/>
-            </a:pPr>
-            <a:r>
-              <a:rPr lang="zh-TW" altLang="en-US" sz="5400" b="1" dirty="0">
-                <a:solidFill>
-                  <a:srgbClr val="000066"/>
-                </a:solidFill>
-                <a:latin typeface="微軟正黑體" pitchFamily="34" charset="-120"/>
-                <a:ea typeface="微軟正黑體" pitchFamily="34" charset="-120"/>
-              </a:rPr>
-              <a:t>你們要向耶和華唱新歌</a:t>
-            </a:r>
-          </a:p>
-          <a:p>
-            <a:pPr algn="ctr">
-              <a:buNone/>
-            </a:pPr>
-            <a:r>
-              <a:rPr lang="zh-TW" altLang="en-US" sz="5400" b="1" dirty="0">
-                <a:solidFill>
-                  <a:srgbClr val="000066"/>
-                </a:solidFill>
-                <a:latin typeface="微軟正黑體" pitchFamily="34" charset="-120"/>
-                <a:ea typeface="微軟正黑體" pitchFamily="34" charset="-120"/>
-              </a:rPr>
-              <a:t>全地都要向耶和華歌唱</a:t>
-            </a:r>
-          </a:p>
-          <a:p>
-            <a:pPr algn="ctr">
-              <a:buNone/>
-            </a:pPr>
-            <a:r>
-              <a:rPr lang="zh-TW" altLang="en-US" sz="5400" b="1" dirty="0">
-                <a:solidFill>
-                  <a:srgbClr val="000066"/>
-                </a:solidFill>
-                <a:latin typeface="微軟正黑體" pitchFamily="34" charset="-120"/>
-                <a:ea typeface="微軟正黑體" pitchFamily="34" charset="-120"/>
-              </a:rPr>
-              <a:t>要向耶和華</a:t>
-            </a:r>
-            <a:r>
-              <a:rPr lang="zh-TW" altLang="en-US" sz="5400" b="1" dirty="0">
-                <a:solidFill>
-                  <a:srgbClr val="000066"/>
-                </a:solidFill>
-                <a:latin typeface="微軟正黑體" pitchFamily="34" charset="-120"/>
-                <a:ea typeface="微軟正黑體" pitchFamily="34" charset="-120"/>
-              </a:rPr>
-              <a:t>歌唱</a:t>
-            </a:r>
-            <a:endParaRPr lang="en-US" altLang="zh-TW" sz="5400" b="1" dirty="0">
-              <a:solidFill>
-                <a:srgbClr val="000066"/>
-              </a:solidFill>
-              <a:latin typeface="微軟正黑體" pitchFamily="34" charset="-120"/>
-              <a:ea typeface="微軟正黑體" pitchFamily="34" charset="-120"/>
-            </a:endParaRPr>
-          </a:p>
-          <a:p>
-            <a:pPr algn="ctr">
-              <a:buNone/>
-            </a:pPr>
-            <a:r>
-              <a:rPr lang="zh-TW" altLang="en-US" sz="5400" b="1" dirty="0">
-                <a:solidFill>
-                  <a:srgbClr val="000066"/>
-                </a:solidFill>
-                <a:latin typeface="微軟正黑體" pitchFamily="34" charset="-120"/>
-                <a:ea typeface="微軟正黑體" pitchFamily="34" charset="-120"/>
-              </a:rPr>
-              <a:t>稱頌祂的名</a:t>
-            </a:r>
-            <a:r>
-              <a:rPr lang="en-US" sz="5400" b="1" dirty="0">
-                <a:solidFill>
-                  <a:srgbClr val="000066"/>
-                </a:solidFill>
-                <a:latin typeface="微軟正黑體" pitchFamily="34" charset="-120"/>
-                <a:ea typeface="微軟正黑體" pitchFamily="34" charset="-120"/>
-              </a:rPr>
-              <a:t>  </a:t>
-            </a:r>
-            <a:r>
-              <a:rPr lang="zh-TW" altLang="en-US" sz="5400" b="1" dirty="0">
-                <a:solidFill>
-                  <a:srgbClr val="000066"/>
-                </a:solidFill>
-                <a:latin typeface="微軟正黑體" pitchFamily="34" charset="-120"/>
-                <a:ea typeface="微軟正黑體" pitchFamily="34" charset="-120"/>
-              </a:rPr>
-              <a:t>祂的名</a:t>
-            </a:r>
-          </a:p>
-          <a:p>
-            <a:pPr algn="ctr">
-              <a:buNone/>
-            </a:pPr>
-            <a:r>
-              <a:rPr lang="zh-TW" altLang="en-US" sz="5400" b="1" dirty="0">
-                <a:solidFill>
-                  <a:srgbClr val="000066"/>
-                </a:solidFill>
-                <a:latin typeface="微軟正黑體" pitchFamily="34" charset="-120"/>
-                <a:ea typeface="微軟正黑體" pitchFamily="34" charset="-120"/>
-              </a:rPr>
-              <a:t>天天</a:t>
-            </a:r>
-            <a:r>
-              <a:rPr lang="zh-TW" altLang="en-US" sz="5400" b="1" dirty="0">
-                <a:solidFill>
-                  <a:srgbClr val="000066"/>
-                </a:solidFill>
-                <a:latin typeface="微軟正黑體" pitchFamily="34" charset="-120"/>
-                <a:ea typeface="微軟正黑體" pitchFamily="34" charset="-120"/>
-              </a:rPr>
-              <a:t>傳揚祂的救恩</a:t>
-            </a:r>
-          </a:p>
-          <a:p>
-            <a:pPr algn="ctr">
-              <a:buNone/>
-            </a:pPr>
-            <a:r>
-              <a:rPr lang="zh-TW" altLang="en-US" sz="5400" b="1" dirty="0">
-                <a:solidFill>
-                  <a:srgbClr val="000066"/>
-                </a:solidFill>
-                <a:latin typeface="微軟正黑體" pitchFamily="34" charset="-120"/>
-                <a:ea typeface="微軟正黑體" pitchFamily="34" charset="-120"/>
-              </a:rPr>
-              <a:t>天天傳揚祂的救</a:t>
-            </a:r>
-            <a:r>
-              <a:rPr lang="zh-TW" altLang="en-US" sz="5400" b="1" dirty="0">
-                <a:solidFill>
-                  <a:srgbClr val="000066"/>
-                </a:solidFill>
-                <a:latin typeface="微軟正黑體" pitchFamily="34" charset="-120"/>
-                <a:ea typeface="微軟正黑體" pitchFamily="34" charset="-120"/>
-              </a:rPr>
-              <a:t>恩</a:t>
-            </a:r>
-            <a:endParaRPr lang="zh-TW" altLang="en-US" sz="5400" b="1" dirty="0">
-              <a:solidFill>
-                <a:srgbClr val="000066"/>
-              </a:solidFill>
-              <a:latin typeface="微軟正黑體" pitchFamily="34" charset="-120"/>
-              <a:ea typeface="微軟正黑體" pitchFamily="34" charset="-120"/>
-            </a:endParaRPr>
+              <a:t>向耶和華唱新歌</a:t>
+            </a:r>
           </a:p>
         </p:txBody>
       </p:sp>
@@ -3341,37 +3136,180 @@
       </p:grpSpPr>
       <p:sp>
         <p:nvSpPr>
-          <p:cNvPr id="4" name="標題 3"/>
-          <p:cNvSpPr>
-            <a:spLocks noGrp="1"/>
-          </p:cNvSpPr>
-          <p:nvPr>
-            <p:ph type="title"/>
+          <p:cNvPr id="5" name="內容版面配置區 4"/>
+          <p:cNvSpPr>
+            <a:spLocks noGrp="1"/>
+          </p:cNvSpPr>
+          <p:nvPr>
+            <p:ph idx="1"/>
           </p:nvPr>
         </p:nvSpPr>
         <p:spPr>
           <a:xfrm>
-            <a:off x="1524000" y="0"/>
-            <a:ext cx="9144000" cy="928670"/>
+            <a:off x="0" y="2084851"/>
+            <a:ext cx="12192000" cy="2404863"/>
           </a:xfrm>
         </p:spPr>
         <p:txBody>
-          <a:bodyPr>
+          <a:bodyPr anchor="ctr">
             <a:normAutofit/>
           </a:bodyPr>
           <a:lstStyle/>
           <a:p>
-            <a:r>
-              <a:rPr lang="zh-TW" altLang="en-US" b="1" dirty="0" smtClean="0">
+            <a:pPr algn="ctr">
+              <a:buNone/>
+            </a:pPr>
+            <a:r>
+              <a:rPr lang="zh-TW" altLang="en-US" sz="6400" b="1" dirty="0">
                 <a:solidFill>
                   <a:srgbClr val="000066"/>
                 </a:solidFill>
                 <a:latin typeface="微軟正黑體" pitchFamily="34" charset="-120"/>
                 <a:ea typeface="微軟正黑體" pitchFamily="34" charset="-120"/>
               </a:rPr>
-              <a:t>向耶和華唱新歌</a:t>
-            </a:r>
-            <a:endParaRPr lang="zh-TW" altLang="en-US" b="1" dirty="0">
+              <a:t>你們要向耶和華唱新歌</a:t>
+            </a:r>
+          </a:p>
+          <a:p>
+            <a:pPr algn="ctr">
+              <a:buNone/>
+            </a:pPr>
+            <a:r>
+              <a:rPr lang="zh-TW" altLang="en-US" sz="6400" b="1" dirty="0">
+                <a:solidFill>
+                  <a:srgbClr val="000066"/>
+                </a:solidFill>
+                <a:latin typeface="微軟正黑體" pitchFamily="34" charset="-120"/>
+                <a:ea typeface="微軟正黑體" pitchFamily="34" charset="-120"/>
+              </a:rPr>
+              <a:t>全地都要向耶和華歌唱</a:t>
+            </a:r>
+          </a:p>
+        </p:txBody>
+      </p:sp>
+      <p:sp>
+        <p:nvSpPr>
+          <p:cNvPr id="3" name="TextBox 2"/>
+          <p:cNvSpPr txBox="1"/>
+          <p:nvPr/>
+        </p:nvSpPr>
+        <p:spPr>
+          <a:xfrm>
+            <a:off x="0" y="5157192"/>
+            <a:ext cx="12192000" cy="666786"/>
+          </a:xfrm>
+          <a:prstGeom prst="rect">
+            <a:avLst/>
+          </a:prstGeom>
+          <a:noFill/>
+        </p:spPr>
+        <p:txBody>
+          <a:bodyPr wrap="square" rtlCol="0">
+            <a:spAutoFit/>
+          </a:bodyPr>
+          <a:lstStyle/>
+          <a:p>
+            <a:pPr algn="ctr"/>
+            <a:r>
+              <a:rPr lang="en-US" sz="3733" b="1" dirty="0">
+                <a:solidFill>
+                  <a:srgbClr val="000066"/>
+                </a:solidFill>
+                <a:latin typeface="Microsoft JhengHei" panose="020B0604030504040204" pitchFamily="34" charset="-120"/>
+                <a:ea typeface="Microsoft JhengHei" panose="020B0604030504040204" pitchFamily="34" charset="-120"/>
+              </a:rPr>
+              <a:t>( </a:t>
+            </a:r>
+            <a:r>
+              <a:rPr lang="zh-CN" altLang="en-US" sz="3733" b="1" dirty="0">
+                <a:solidFill>
+                  <a:srgbClr val="000066"/>
+                </a:solidFill>
+                <a:latin typeface="Microsoft JhengHei" panose="020B0604030504040204" pitchFamily="34" charset="-120"/>
+                <a:ea typeface="Microsoft JhengHei" panose="020B0604030504040204" pitchFamily="34" charset="-120"/>
+              </a:rPr>
+              <a:t>正歌</a:t>
+            </a:r>
+            <a:r>
+              <a:rPr lang="en-US" sz="3733" b="1" dirty="0">
+                <a:solidFill>
+                  <a:srgbClr val="000066"/>
+                </a:solidFill>
+                <a:latin typeface="Microsoft JhengHei" panose="020B0604030504040204" pitchFamily="34" charset="-120"/>
+                <a:ea typeface="Microsoft JhengHei" panose="020B0604030504040204" pitchFamily="34" charset="-120"/>
+              </a:rPr>
+              <a:t> )</a:t>
+            </a:r>
+            <a:endParaRPr lang="vi-VN" sz="3733" b="1" dirty="0">
+              <a:solidFill>
+                <a:srgbClr val="000066"/>
+              </a:solidFill>
+              <a:ea typeface="Microsoft JhengHei" panose="020B0604030504040204" pitchFamily="34" charset="-120"/>
+            </a:endParaRPr>
+          </a:p>
+        </p:txBody>
+      </p:sp>
+    </p:spTree>
+  </p:cSld>
+  <p:clrMapOvr>
+    <a:masterClrMapping/>
+  </p:clrMapOvr>
+</p:sld>
+</file>
+
+<file path=ppt/slides/slide3.xml><?xml version="1.0" encoding="utf-8"?>
+<p:sld xmlns:a="http://schemas.openxmlformats.org/drawingml/2006/main" xmlns:r="http://schemas.openxmlformats.org/officeDocument/2006/relationships" xmlns:p="http://schemas.openxmlformats.org/presentationml/2006/main">
+  <p:cSld>
+    <p:spTree>
+      <p:nvGrpSpPr>
+        <p:cNvPr id="1" name=""/>
+        <p:cNvGrpSpPr/>
+        <p:nvPr/>
+      </p:nvGrpSpPr>
+      <p:grpSpPr>
+        <a:xfrm>
+          <a:off x="0" y="0"/>
+          <a:ext cx="0" cy="0"/>
+          <a:chOff x="0" y="0"/>
+          <a:chExt cx="0" cy="0"/>
+        </a:xfrm>
+      </p:grpSpPr>
+      <p:sp>
+        <p:nvSpPr>
+          <p:cNvPr id="5" name="內容版面配置區 4"/>
+          <p:cNvSpPr>
+            <a:spLocks noGrp="1"/>
+          </p:cNvSpPr>
+          <p:nvPr>
+            <p:ph idx="1"/>
+          </p:nvPr>
+        </p:nvSpPr>
+        <p:spPr>
+          <a:xfrm>
+            <a:off x="0" y="2084851"/>
+            <a:ext cx="12192000" cy="2404863"/>
+          </a:xfrm>
+        </p:spPr>
+        <p:txBody>
+          <a:bodyPr anchor="ctr">
+            <a:normAutofit/>
+          </a:bodyPr>
+          <a:lstStyle/>
+          <a:p>
+            <a:pPr algn="ctr">
+              <a:buNone/>
+            </a:pPr>
+            <a:r>
+              <a:rPr lang="zh-TW" altLang="en-US" sz="6400" b="1" dirty="0">
+                <a:solidFill>
+                  <a:srgbClr val="000066"/>
+                </a:solidFill>
+                <a:latin typeface="微軟正黑體" pitchFamily="34" charset="-120"/>
+                <a:ea typeface="微軟正黑體" pitchFamily="34" charset="-120"/>
+              </a:rPr>
+              <a:t>要向耶和華歌唱</a:t>
+            </a:r>
+            <a:endParaRPr lang="en-US" altLang="zh-TW" sz="6400" b="1" dirty="0">
               <a:solidFill>
                 <a:srgbClr val="000066"/>
               </a:solidFill>
@@ -3379,27 +3317,154 @@
               <a:ea typeface="微軟正黑體" pitchFamily="34" charset="-120"/>
             </a:endParaRPr>
           </a:p>
-        </p:txBody>
-      </p:sp>
-      <p:sp>
-        <p:nvSpPr>
-          <p:cNvPr id="5" name="內容版面配置區 4"/>
-          <p:cNvSpPr>
-            <a:spLocks noGrp="1"/>
-          </p:cNvSpPr>
-          <p:nvPr>
-            <p:ph idx="1"/>
-          </p:nvPr>
+          <a:p>
+            <a:pPr algn="ctr">
+              <a:buNone/>
+            </a:pPr>
+            <a:r>
+              <a:rPr lang="zh-TW" altLang="en-US" sz="6400" b="1" dirty="0">
+                <a:solidFill>
+                  <a:srgbClr val="000066"/>
+                </a:solidFill>
+                <a:latin typeface="微軟正黑體" pitchFamily="34" charset="-120"/>
+                <a:ea typeface="微軟正黑體" pitchFamily="34" charset="-120"/>
+              </a:rPr>
+              <a:t>稱頌祂的名</a:t>
+            </a:r>
+            <a:r>
+              <a:rPr lang="en-US" sz="6400" b="1" dirty="0">
+                <a:solidFill>
+                  <a:srgbClr val="000066"/>
+                </a:solidFill>
+                <a:latin typeface="微軟正黑體" pitchFamily="34" charset="-120"/>
+                <a:ea typeface="微軟正黑體" pitchFamily="34" charset="-120"/>
+              </a:rPr>
+              <a:t>  </a:t>
+            </a:r>
+            <a:r>
+              <a:rPr lang="zh-TW" altLang="en-US" sz="6400" b="1" dirty="0">
+                <a:solidFill>
+                  <a:srgbClr val="000066"/>
+                </a:solidFill>
+                <a:latin typeface="微軟正黑體" pitchFamily="34" charset="-120"/>
+                <a:ea typeface="微軟正黑體" pitchFamily="34" charset="-120"/>
+              </a:rPr>
+              <a:t>祂的名</a:t>
+            </a:r>
+          </a:p>
+        </p:txBody>
+      </p:sp>
+      <p:sp>
+        <p:nvSpPr>
+          <p:cNvPr id="3" name="TextBox 2"/>
+          <p:cNvSpPr txBox="1"/>
+          <p:nvPr/>
         </p:nvSpPr>
         <p:spPr>
           <a:xfrm>
-            <a:off x="1524000" y="1357298"/>
-            <a:ext cx="9043958" cy="5500702"/>
+            <a:off x="0" y="5157192"/>
+            <a:ext cx="12192000" cy="666786"/>
+          </a:xfrm>
+          <a:prstGeom prst="rect">
+            <a:avLst/>
+          </a:prstGeom>
+          <a:noFill/>
+        </p:spPr>
+        <p:txBody>
+          <a:bodyPr wrap="square" rtlCol="0">
+            <a:spAutoFit/>
+          </a:bodyPr>
+          <a:lstStyle/>
+          <a:p>
+            <a:pPr algn="ctr"/>
+            <a:r>
+              <a:rPr lang="en-US" sz="3733" b="1" dirty="0">
+                <a:solidFill>
+                  <a:srgbClr val="000066"/>
+                </a:solidFill>
+                <a:latin typeface="Microsoft JhengHei" panose="020B0604030504040204" pitchFamily="34" charset="-120"/>
+                <a:ea typeface="Microsoft JhengHei" panose="020B0604030504040204" pitchFamily="34" charset="-120"/>
+              </a:rPr>
+              <a:t>( </a:t>
+            </a:r>
+            <a:r>
+              <a:rPr lang="zh-CN" altLang="en-US" sz="3733" b="1" dirty="0">
+                <a:solidFill>
+                  <a:srgbClr val="000066"/>
+                </a:solidFill>
+                <a:latin typeface="Microsoft JhengHei" panose="020B0604030504040204" pitchFamily="34" charset="-120"/>
+                <a:ea typeface="Microsoft JhengHei" panose="020B0604030504040204" pitchFamily="34" charset="-120"/>
+              </a:rPr>
+              <a:t>正歌</a:t>
+            </a:r>
+            <a:r>
+              <a:rPr lang="en-US" sz="3733" b="1" dirty="0">
+                <a:solidFill>
+                  <a:srgbClr val="000066"/>
+                </a:solidFill>
+                <a:latin typeface="Microsoft JhengHei" panose="020B0604030504040204" pitchFamily="34" charset="-120"/>
+                <a:ea typeface="Microsoft JhengHei" panose="020B0604030504040204" pitchFamily="34" charset="-120"/>
+              </a:rPr>
+              <a:t> )</a:t>
+            </a:r>
+            <a:endParaRPr lang="vi-VN" sz="3733" b="1" dirty="0">
+              <a:solidFill>
+                <a:srgbClr val="000066"/>
+              </a:solidFill>
+              <a:ea typeface="Microsoft JhengHei" panose="020B0604030504040204" pitchFamily="34" charset="-120"/>
+            </a:endParaRPr>
+          </a:p>
+        </p:txBody>
+      </p:sp>
+    </p:spTree>
+    <p:extLst>
+      <p:ext uri="{BB962C8B-B14F-4D97-AF65-F5344CB8AC3E}">
+        <p14:creationId xmlns:p14="http://schemas.microsoft.com/office/powerpoint/2010/main" val="3122698782"/>
+      </p:ext>
+    </p:extLst>
+  </p:cSld>
+  <p:clrMapOvr>
+    <a:masterClrMapping/>
+  </p:clrMapOvr>
+</p:sld>
+</file>
+
+<file path=ppt/slides/slide4.xml><?xml version="1.0" encoding="utf-8"?>
+<p:sld xmlns:a="http://schemas.openxmlformats.org/drawingml/2006/main" xmlns:r="http://schemas.openxmlformats.org/officeDocument/2006/relationships" xmlns:p="http://schemas.openxmlformats.org/presentationml/2006/main">
+  <p:cSld>
+    <p:spTree>
+      <p:nvGrpSpPr>
+        <p:cNvPr id="1" name=""/>
+        <p:cNvGrpSpPr/>
+        <p:nvPr/>
+      </p:nvGrpSpPr>
+      <p:grpSpPr>
+        <a:xfrm>
+          <a:off x="0" y="0"/>
+          <a:ext cx="0" cy="0"/>
+          <a:chOff x="0" y="0"/>
+          <a:chExt cx="0" cy="0"/>
+        </a:xfrm>
+      </p:grpSpPr>
+      <p:sp>
+        <p:nvSpPr>
+          <p:cNvPr id="5" name="內容版面配置區 4"/>
+          <p:cNvSpPr>
+            <a:spLocks noGrp="1"/>
+          </p:cNvSpPr>
+          <p:nvPr>
+            <p:ph idx="1"/>
+          </p:nvPr>
+        </p:nvSpPr>
+        <p:spPr>
+          <a:xfrm>
+            <a:off x="0" y="2084851"/>
+            <a:ext cx="12192000" cy="2404863"/>
           </a:xfrm>
         </p:spPr>
         <p:txBody>
-          <a:bodyPr>
-            <a:noAutofit/>
+          <a:bodyPr anchor="ctr">
+            <a:normAutofit/>
           </a:bodyPr>
           <a:lstStyle/>
           <a:p>
@@ -3407,7 +3472,152 @@
               <a:buNone/>
             </a:pPr>
             <a:r>
-              <a:rPr lang="zh-TW" altLang="en-US" sz="5400" b="1" dirty="0">
+              <a:rPr lang="zh-TW" altLang="en-US" sz="6400" b="1" dirty="0">
+                <a:solidFill>
+                  <a:srgbClr val="000066"/>
+                </a:solidFill>
+                <a:latin typeface="微軟正黑體" pitchFamily="34" charset="-120"/>
+                <a:ea typeface="微軟正黑體" pitchFamily="34" charset="-120"/>
+              </a:rPr>
+              <a:t>天天傳揚祂的救恩</a:t>
+            </a:r>
+          </a:p>
+          <a:p>
+            <a:pPr algn="ctr">
+              <a:buNone/>
+            </a:pPr>
+            <a:r>
+              <a:rPr lang="zh-TW" altLang="en-US" sz="6400" b="1" dirty="0">
+                <a:solidFill>
+                  <a:srgbClr val="000066"/>
+                </a:solidFill>
+                <a:latin typeface="微軟正黑體" pitchFamily="34" charset="-120"/>
+                <a:ea typeface="微軟正黑體" pitchFamily="34" charset="-120"/>
+              </a:rPr>
+              <a:t>天天傳揚祂的救恩</a:t>
+            </a:r>
+          </a:p>
+        </p:txBody>
+      </p:sp>
+      <p:sp>
+        <p:nvSpPr>
+          <p:cNvPr id="3" name="TextBox 2"/>
+          <p:cNvSpPr txBox="1"/>
+          <p:nvPr/>
+        </p:nvSpPr>
+        <p:spPr>
+          <a:xfrm>
+            <a:off x="0" y="5157192"/>
+            <a:ext cx="12192000" cy="666786"/>
+          </a:xfrm>
+          <a:prstGeom prst="rect">
+            <a:avLst/>
+          </a:prstGeom>
+          <a:noFill/>
+        </p:spPr>
+        <p:txBody>
+          <a:bodyPr wrap="square" rtlCol="0">
+            <a:spAutoFit/>
+          </a:bodyPr>
+          <a:lstStyle/>
+          <a:p>
+            <a:pPr algn="ctr"/>
+            <a:r>
+              <a:rPr lang="en-US" sz="3733" b="1" dirty="0">
+                <a:solidFill>
+                  <a:srgbClr val="000066"/>
+                </a:solidFill>
+                <a:latin typeface="Microsoft JhengHei" panose="020B0604030504040204" pitchFamily="34" charset="-120"/>
+                <a:ea typeface="Microsoft JhengHei" panose="020B0604030504040204" pitchFamily="34" charset="-120"/>
+              </a:rPr>
+              <a:t>( </a:t>
+            </a:r>
+            <a:r>
+              <a:rPr lang="zh-CN" altLang="en-US" sz="3733" b="1" dirty="0">
+                <a:solidFill>
+                  <a:srgbClr val="000066"/>
+                </a:solidFill>
+                <a:latin typeface="Microsoft JhengHei" panose="020B0604030504040204" pitchFamily="34" charset="-120"/>
+                <a:ea typeface="Microsoft JhengHei" panose="020B0604030504040204" pitchFamily="34" charset="-120"/>
+              </a:rPr>
+              <a:t>正歌</a:t>
+            </a:r>
+            <a:r>
+              <a:rPr lang="en-US" sz="3733" b="1" dirty="0">
+                <a:solidFill>
+                  <a:srgbClr val="000066"/>
+                </a:solidFill>
+                <a:latin typeface="Microsoft JhengHei" panose="020B0604030504040204" pitchFamily="34" charset="-120"/>
+                <a:ea typeface="Microsoft JhengHei" panose="020B0604030504040204" pitchFamily="34" charset="-120"/>
+              </a:rPr>
+              <a:t> )</a:t>
+            </a:r>
+            <a:endParaRPr lang="vi-VN" sz="3733" b="1" dirty="0">
+              <a:solidFill>
+                <a:srgbClr val="000066"/>
+              </a:solidFill>
+              <a:ea typeface="Microsoft JhengHei" panose="020B0604030504040204" pitchFamily="34" charset="-120"/>
+            </a:endParaRPr>
+          </a:p>
+        </p:txBody>
+      </p:sp>
+    </p:spTree>
+    <p:extLst>
+      <p:ext uri="{BB962C8B-B14F-4D97-AF65-F5344CB8AC3E}">
+        <p14:creationId xmlns:p14="http://schemas.microsoft.com/office/powerpoint/2010/main" val="4034449372"/>
+      </p:ext>
+    </p:extLst>
+  </p:cSld>
+  <p:clrMapOvr>
+    <a:masterClrMapping/>
+  </p:clrMapOvr>
+</p:sld>
+</file>
+
+<file path=ppt/slides/slide5.xml><?xml version="1.0" encoding="utf-8"?>
+<p:sld xmlns:a="http://schemas.openxmlformats.org/drawingml/2006/main" xmlns:r="http://schemas.openxmlformats.org/officeDocument/2006/relationships" xmlns:p="http://schemas.openxmlformats.org/presentationml/2006/main">
+  <p:cSld>
+    <p:spTree>
+      <p:nvGrpSpPr>
+        <p:cNvPr id="1" name=""/>
+        <p:cNvGrpSpPr/>
+        <p:nvPr/>
+      </p:nvGrpSpPr>
+      <p:grpSpPr>
+        <a:xfrm>
+          <a:off x="0" y="0"/>
+          <a:ext cx="0" cy="0"/>
+          <a:chOff x="0" y="0"/>
+          <a:chExt cx="0" cy="0"/>
+        </a:xfrm>
+      </p:grpSpPr>
+      <p:sp>
+        <p:nvSpPr>
+          <p:cNvPr id="5" name="內容版面配置區 4"/>
+          <p:cNvSpPr>
+            <a:spLocks noGrp="1"/>
+          </p:cNvSpPr>
+          <p:nvPr>
+            <p:ph idx="1"/>
+          </p:nvPr>
+        </p:nvSpPr>
+        <p:spPr>
+          <a:xfrm>
+            <a:off x="0" y="2084851"/>
+            <a:ext cx="12192000" cy="2404863"/>
+          </a:xfrm>
+        </p:spPr>
+        <p:txBody>
+          <a:bodyPr anchor="ctr">
+            <a:normAutofit/>
+          </a:bodyPr>
+          <a:lstStyle/>
+          <a:p>
+            <a:pPr algn="ctr">
+              <a:buNone/>
+            </a:pPr>
+            <a:r>
+              <a:rPr lang="zh-TW" altLang="en-US" sz="6400" b="1" dirty="0">
                 <a:solidFill>
                   <a:srgbClr val="000066"/>
                 </a:solidFill>
@@ -3422,7 +3632,7 @@
               <a:buNone/>
             </a:pPr>
             <a:r>
-              <a:rPr lang="zh-TW" altLang="en-US" sz="5400" b="1" dirty="0">
+              <a:rPr lang="zh-TW" altLang="en-US" sz="6400" b="1" dirty="0">
                 <a:solidFill>
                   <a:srgbClr val="000066"/>
                 </a:solidFill>
@@ -3432,12 +3642,127 @@
               <a:t>在萬民中訴說祂的奇事</a:t>
             </a:r>
           </a:p>
+        </p:txBody>
+      </p:sp>
+      <p:sp>
+        <p:nvSpPr>
+          <p:cNvPr id="3" name="TextBox 2"/>
+          <p:cNvSpPr txBox="1"/>
+          <p:nvPr/>
+        </p:nvSpPr>
+        <p:spPr>
+          <a:xfrm>
+            <a:off x="0" y="5157192"/>
+            <a:ext cx="12192000" cy="666786"/>
+          </a:xfrm>
+          <a:prstGeom prst="rect">
+            <a:avLst/>
+          </a:prstGeom>
+          <a:noFill/>
+        </p:spPr>
+        <p:txBody>
+          <a:bodyPr wrap="square" rtlCol="0">
+            <a:spAutoFit/>
+          </a:bodyPr>
+          <a:lstStyle/>
+          <a:p>
+            <a:pPr algn="ctr"/>
+            <a:r>
+              <a:rPr lang="en-US" sz="3733" b="1" dirty="0">
+                <a:solidFill>
+                  <a:srgbClr val="000066"/>
+                </a:solidFill>
+                <a:latin typeface="Microsoft JhengHei" panose="020B0604030504040204" pitchFamily="34" charset="-120"/>
+                <a:ea typeface="Microsoft JhengHei" panose="020B0604030504040204" pitchFamily="34" charset="-120"/>
+              </a:rPr>
+              <a:t>( </a:t>
+            </a:r>
+            <a:r>
+              <a:rPr lang="zh-CN" altLang="en-US" sz="3733" b="1" dirty="0">
+                <a:solidFill>
+                  <a:srgbClr val="000066"/>
+                </a:solidFill>
+                <a:latin typeface="Microsoft JhengHei" panose="020B0604030504040204" pitchFamily="34" charset="-120"/>
+                <a:ea typeface="Microsoft JhengHei" panose="020B0604030504040204" pitchFamily="34" charset="-120"/>
+              </a:rPr>
+              <a:t>副歌</a:t>
+            </a:r>
+            <a:r>
+              <a:rPr lang="en-US" sz="3733" b="1" dirty="0">
+                <a:solidFill>
+                  <a:srgbClr val="000066"/>
+                </a:solidFill>
+                <a:latin typeface="Microsoft JhengHei" panose="020B0604030504040204" pitchFamily="34" charset="-120"/>
+                <a:ea typeface="Microsoft JhengHei" panose="020B0604030504040204" pitchFamily="34" charset="-120"/>
+              </a:rPr>
+              <a:t> )</a:t>
+            </a:r>
+            <a:endParaRPr lang="vi-VN" sz="3733" b="1" dirty="0">
+              <a:solidFill>
+                <a:srgbClr val="000066"/>
+              </a:solidFill>
+              <a:ea typeface="Microsoft JhengHei" panose="020B0604030504040204" pitchFamily="34" charset="-120"/>
+            </a:endParaRPr>
+          </a:p>
+        </p:txBody>
+      </p:sp>
+    </p:spTree>
+    <p:extLst>
+      <p:ext uri="{BB962C8B-B14F-4D97-AF65-F5344CB8AC3E}">
+        <p14:creationId xmlns:p14="http://schemas.microsoft.com/office/powerpoint/2010/main" val="788395191"/>
+      </p:ext>
+    </p:extLst>
+  </p:cSld>
+  <p:clrMapOvr>
+    <a:masterClrMapping/>
+  </p:clrMapOvr>
+</p:sld>
+</file>
+
+<file path=ppt/slides/slide6.xml><?xml version="1.0" encoding="utf-8"?>
+<p:sld xmlns:a="http://schemas.openxmlformats.org/drawingml/2006/main" xmlns:r="http://schemas.openxmlformats.org/officeDocument/2006/relationships" xmlns:p="http://schemas.openxmlformats.org/presentationml/2006/main">
+  <p:cSld>
+    <p:spTree>
+      <p:nvGrpSpPr>
+        <p:cNvPr id="1" name=""/>
+        <p:cNvGrpSpPr/>
+        <p:nvPr/>
+      </p:nvGrpSpPr>
+      <p:grpSpPr>
+        <a:xfrm>
+          <a:off x="0" y="0"/>
+          <a:ext cx="0" cy="0"/>
+          <a:chOff x="0" y="0"/>
+          <a:chExt cx="0" cy="0"/>
+        </a:xfrm>
+      </p:grpSpPr>
+      <p:sp>
+        <p:nvSpPr>
+          <p:cNvPr id="5" name="內容版面配置區 4"/>
+          <p:cNvSpPr>
+            <a:spLocks noGrp="1"/>
+          </p:cNvSpPr>
+          <p:nvPr>
+            <p:ph idx="1"/>
+          </p:nvPr>
+        </p:nvSpPr>
+        <p:spPr>
+          <a:xfrm>
+            <a:off x="0" y="2084851"/>
+            <a:ext cx="12192000" cy="2404863"/>
+          </a:xfrm>
+        </p:spPr>
+        <p:txBody>
+          <a:bodyPr anchor="ctr">
+            <a:normAutofit/>
+          </a:bodyPr>
+          <a:lstStyle/>
           <a:p>
             <a:pPr algn="ctr">
               <a:buNone/>
             </a:pPr>
             <a:r>
-              <a:rPr lang="zh-TW" altLang="en-US" sz="5400" b="1" dirty="0">
+              <a:rPr lang="zh-TW" altLang="en-US" sz="6400" b="1" dirty="0">
                 <a:solidFill>
                   <a:srgbClr val="000066"/>
                 </a:solidFill>
@@ -3447,29 +3772,17 @@
               <a:t>因耶和華為大</a:t>
             </a:r>
             <a:r>
-              <a:rPr lang="en-US" sz="5400" b="1" dirty="0">
+              <a:rPr lang="en-US" sz="6400" b="1" dirty="0">
                 <a:solidFill>
                   <a:srgbClr val="000066"/>
                 </a:solidFill>
                 <a:latin typeface="微軟正黑體" pitchFamily="34" charset="-120"/>
                 <a:ea typeface="微軟正黑體" pitchFamily="34" charset="-120"/>
               </a:rPr>
-              <a:t> </a:t>
-            </a:r>
-            <a:endParaRPr lang="zh-TW" altLang="en-US" sz="5400" b="1" dirty="0">
-              <a:solidFill>
-                <a:srgbClr val="000066"/>
-              </a:solidFill>
-              <a:latin typeface="微軟正黑體" pitchFamily="34" charset="-120"/>
-              <a:ea typeface="微軟正黑體" pitchFamily="34" charset="-120"/>
-            </a:endParaRPr>
-          </a:p>
-          <a:p>
-            <a:pPr algn="ctr">
-              <a:buNone/>
-            </a:pPr>
-            <a:r>
-              <a:rPr lang="zh-TW" altLang="en-US" sz="5400" b="1" dirty="0">
+              <a:t>  </a:t>
+            </a:r>
+            <a:r>
+              <a:rPr lang="zh-TW" altLang="en-US" sz="6400" b="1" dirty="0">
                 <a:solidFill>
                   <a:srgbClr val="000066"/>
                 </a:solidFill>
@@ -3484,26 +3797,86 @@
               <a:buNone/>
             </a:pPr>
             <a:r>
-              <a:rPr lang="zh-TW" altLang="en-US" sz="5400" b="1" dirty="0">
+              <a:rPr lang="zh-TW" altLang="en-US" sz="6400" b="1" dirty="0">
                 <a:solidFill>
                   <a:srgbClr val="000066"/>
                 </a:solidFill>
                 <a:latin typeface="微軟正黑體" pitchFamily="34" charset="-120"/>
                 <a:ea typeface="微軟正黑體" pitchFamily="34" charset="-120"/>
               </a:rPr>
-              <a:t>祂在萬神之上 當受敬畏</a:t>
-            </a:r>
-            <a:endParaRPr lang="zh-TW" altLang="en-US" sz="5400" b="1" dirty="0">
+              <a:t>祂在萬神之上  當受敬畏</a:t>
+            </a:r>
+          </a:p>
+        </p:txBody>
+      </p:sp>
+      <p:sp>
+        <p:nvSpPr>
+          <p:cNvPr id="3" name="TextBox 2"/>
+          <p:cNvSpPr txBox="1"/>
+          <p:nvPr/>
+        </p:nvSpPr>
+        <p:spPr>
+          <a:xfrm>
+            <a:off x="0" y="5157192"/>
+            <a:ext cx="12192000" cy="666786"/>
+          </a:xfrm>
+          <a:prstGeom prst="rect">
+            <a:avLst/>
+          </a:prstGeom>
+          <a:noFill/>
+        </p:spPr>
+        <p:txBody>
+          <a:bodyPr wrap="square" rtlCol="0">
+            <a:spAutoFit/>
+          </a:bodyPr>
+          <a:lstStyle/>
+          <a:p>
+            <a:pPr algn="ctr"/>
+            <a:r>
+              <a:rPr lang="en-US" sz="3733" b="1" dirty="0">
+                <a:solidFill>
+                  <a:srgbClr val="000066"/>
+                </a:solidFill>
+                <a:latin typeface="Microsoft JhengHei" panose="020B0604030504040204" pitchFamily="34" charset="-120"/>
+                <a:ea typeface="Microsoft JhengHei" panose="020B0604030504040204" pitchFamily="34" charset="-120"/>
+              </a:rPr>
+              <a:t>( </a:t>
+            </a:r>
+            <a:r>
+              <a:rPr lang="zh-CN" altLang="en-US" sz="3733" b="1" dirty="0">
+                <a:solidFill>
+                  <a:srgbClr val="000066"/>
+                </a:solidFill>
+                <a:latin typeface="Microsoft JhengHei" panose="020B0604030504040204" pitchFamily="34" charset="-120"/>
+                <a:ea typeface="Microsoft JhengHei" panose="020B0604030504040204" pitchFamily="34" charset="-120"/>
+              </a:rPr>
+              <a:t>副歌</a:t>
+            </a:r>
+            <a:r>
+              <a:rPr lang="en-US" sz="3733" b="1" dirty="0">
+                <a:solidFill>
+                  <a:srgbClr val="000066"/>
+                </a:solidFill>
+                <a:latin typeface="Microsoft JhengHei" panose="020B0604030504040204" pitchFamily="34" charset="-120"/>
+                <a:ea typeface="Microsoft JhengHei" panose="020B0604030504040204" pitchFamily="34" charset="-120"/>
+              </a:rPr>
+              <a:t> )</a:t>
+            </a:r>
+            <a:endParaRPr lang="vi-VN" sz="3733" b="1" dirty="0">
               <a:solidFill>
                 <a:srgbClr val="000066"/>
               </a:solidFill>
-              <a:latin typeface="微軟正黑體" pitchFamily="34" charset="-120"/>
-              <a:ea typeface="微軟正黑體" pitchFamily="34" charset="-120"/>
+              <a:ea typeface="Microsoft JhengHei" panose="020B0604030504040204" pitchFamily="34" charset="-120"/>
             </a:endParaRPr>
           </a:p>
         </p:txBody>
       </p:sp>
     </p:spTree>
+    <p:extLst>
+      <p:ext uri="{BB962C8B-B14F-4D97-AF65-F5344CB8AC3E}">
+        <p14:creationId xmlns:p14="http://schemas.microsoft.com/office/powerpoint/2010/main" val="1040047120"/>
+      </p:ext>
+    </p:extLst>
   </p:cSld>
   <p:clrMapOvr>
     <a:masterClrMapping/>
